--- a/docs/webinars/06-the-systems-behind-the-website.pptx
+++ b/docs/webinars/06-the-systems-behind-the-website.pptx
@@ -603,7 +603,7 @@
           <a:p>
             <a:r>
               <a:rPr lang="en-US" dirty="0"/>
-              <a:t>Aimed at giving the room confident answers to investor questions. The per-account assembly point is worth repeating: it isn't that other data is hidden — it is never sent.</a:t>
+              <a:t>Aimed at giving the room confident answers to investor questions. The per-account assembly point is worth repeating: it isn't that other data is hidden. It is never sent.</a:t>
             </a:r>
             <a:endParaRPr lang="en-US" dirty="0"/>
           </a:p>
@@ -691,7 +691,7 @@
           <a:p>
             <a:r>
               <a:rPr lang="en-US" dirty="0"/>
-              <a:t>All three fail soft — the design habit across the site: an outside dependency going down degrades a detail, never a page, and never silently. Good answer material for 'what happens if X is down?'.</a:t>
+              <a:t>All three fail soft. The design habit across the site: an outside dependency going down degrades a detail, never a page, and never silently. Good answer material for 'what happens if X is down?'.</a:t>
             </a:r>
             <a:endParaRPr lang="en-US" dirty="0"/>
           </a:p>
@@ -779,7 +779,7 @@
           <a:p>
             <a:r>
               <a:rPr lang="en-US" dirty="0"/>
-              <a:t>The point of the table: route the panic. Content problems are Claude sessions; save problems are the token; sign-in problems are the playbooks; reachability is Vercel/123 Reg. Nothing on this list is fixed by editing the live site — there is no such lever.</a:t>
+              <a:t>The point of the table: route the panic. Content problems are Claude sessions; save problems are the token; sign-in problems are the playbooks; reachability is Vercel/123 Reg. Nothing on this list is fixed by editing the live site. There is no such lever.</a:t>
             </a:r>
             <a:endParaRPr lang="en-US" dirty="0"/>
           </a:p>
@@ -867,7 +867,7 @@
           <a:p>
             <a:r>
               <a:rPr lang="en-US" dirty="0"/>
-              <a:t>Transparency slide — it prevents wrong assumptions downstream ('check the contact-form inbox' — there isn't one yet). Each gap has a clear, small path to close when the business wants it.</a:t>
+              <a:t>Transparency slide. It prevents wrong assumptions downstream. Each gap has a clear, small path to close when the business wants it.</a:t>
             </a:r>
             <a:endParaRPr lang="en-US" dirty="0"/>
           </a:p>
@@ -1043,7 +1043,7 @@
           <a:p>
             <a:r>
               <a:rPr lang="en-US" dirty="0"/>
-              <a:t>Pitch: this is the 'how it all hangs together' session people asked for. Keep it conversational — every slide here answers a 'but where does X actually live?' question.</a:t>
+              <a:t>Pitch: this is the 'how it all hangs together' session people asked for. Keep it conversational. Every slide here answers a 'but where does X actually live?' question.</a:t>
             </a:r>
             <a:endParaRPr lang="en-US" dirty="0"/>
           </a:p>
@@ -1131,7 +1131,7 @@
           <a:p>
             <a:r>
               <a:rPr lang="en-US" dirty="0"/>
-              <a:t>Orient the room left to right: people describe changes, GitHub records them, Vercel rebuilds, the domain serves it. The three feeder boxes below: studio saves commit into GitHub; 123 Reg points the name at Vercel and hosts the mailboxes; the Land Registry feeds market data into the investor portal automatically.</a:t>
+              <a:t>Orient the room left to right: people describe changes, GitHub records them, Vercel rebuilds, the domain serves it. The three feeder boxes below: studio saves commit into GitHub; the Land Registry feeds market data into the site automatically; 123 Reg points the name at Vercel and hosts the mailboxes.</a:t>
             </a:r>
             <a:endParaRPr lang="en-US" dirty="0"/>
           </a:p>
@@ -1219,7 +1219,7 @@
           <a:p>
             <a:r>
               <a:rPr lang="en-US" dirty="0"/>
-              <a:t>The no-separate-database point surprises technical guests. It is deliberate: one system of record, one backup story, one audit trail — and it makes the whole platform portable.</a:t>
+              <a:t>The no-separate-database point surprises technical guests. It is deliberate: one system of record, one backup story, one audit trail. And it makes the whole platform portable.</a:t>
             </a:r>
             <a:endParaRPr lang="en-US" dirty="0"/>
           </a:p>
@@ -1307,7 +1307,7 @@
           <a:p>
             <a:r>
               <a:rPr lang="en-US" dirty="0"/>
-              <a:t>The redeploy rule is the recurring gotcha across sessions: settings changes only apply to new deployments. The live site's files are read-only by design — the printed brochure again.</a:t>
+              <a:t>The redeploy rule is the recurring gotcha across sessions: settings changes only apply to new deployments. The live site's files are read-only by design. The printed brochure again.</a:t>
             </a:r>
             <a:endParaRPr lang="en-US" dirty="0"/>
           </a:p>
@@ -1483,7 +1483,7 @@
           <a:p>
             <a:r>
               <a:rPr lang="en-US" dirty="0"/>
-              <a:t>Keep this practical: 123 Reg is logged into rarely and carefully — its two jobs are pointing the name at Vercel and hosting the mailboxes. The independence point matters during incidents: broken email is never caused by a website deploy.</a:t>
+              <a:t>Keep this practical: 123 Reg is logged into rarely and carefully. Its two jobs are pointing the name at Vercel and hosting the mailboxes. The independence point matters during incidents: broken email is never caused by a website deploy.</a:t>
             </a:r>
             <a:endParaRPr lang="en-US" dirty="0"/>
           </a:p>
@@ -1571,7 +1571,7 @@
           <a:p>
             <a:r>
               <a:rPr lang="en-US" dirty="0"/>
-              <a:t>Nobody needs to memorise these — the table exists so the names aren't scary when they appear in error messages or guides. The three that come up in practice: SATIS_ADMIN_USERS (webinar 03), SATIS_GITHUB_TOKEN (next slide), and SATIS_RESEND_API_KEY (webinar 07).</a:t>
+              <a:t>Nobody needs to memorise these. The table exists so the names aren't scary when they appear in error messages or guides. The three that come up in practice: SATIS_ADMIN_USERS (webinar 03), SATIS_GITHUB_TOKEN (next slide), and SATIS_RESEND_API_KEY (webinar 07).</a:t>
             </a:r>
             <a:endParaRPr lang="en-US" dirty="0"/>
           </a:p>
@@ -1659,7 +1659,7 @@
           <a:p>
             <a:r>
               <a:rPr lang="en-US" dirty="0"/>
-              <a:t>This is the one piece of periodic maintenance the platform has. Symptoms of an expired token: studio warns on load, or Saves refuse. News stories are unaffected either way — they always go the Claude route on live hosting.</a:t>
+              <a:t>This is the one piece of periodic maintenance the platform has. Symptoms of an expired token: studio warns on load, or Saves refuse. News stories are unaffected either way; they always go the Claude route on live hosting.</a:t>
             </a:r>
             <a:endParaRPr lang="en-US" dirty="0"/>
           </a:p>
@@ -2134,7 +2134,7 @@
                 <a:ea typeface="Work Sans" pitchFamily="34" charset="-122"/>
                 <a:cs typeface="Work Sans" pitchFamily="34" charset="-120"/>
               </a:rPr>
-              <a:t>SATIS GROUP — BACKEND WEBINAR SERIES</a:t>
+              <a:t>SATIS GROUP · BACKEND WEBINAR SERIES</a:t>
             </a:r>
             <a:endParaRPr lang="en-US" sz="950" dirty="0"/>
           </a:p>
@@ -2293,7 +2293,7 @@
                 <a:ea typeface="Work Sans" pitchFamily="34" charset="-122"/>
                 <a:cs typeface="Work Sans" pitchFamily="34" charset="-120"/>
               </a:rPr>
-              <a:t>GitHub, Vercel, 123 Reg and the moving parts — what each one does, how a change travels, and what to check when something misbehaves.</a:t>
+              <a:t>GitHub, Vercel, 123 Reg and the moving parts: what each one does, how a change travels, and what to check when something misbehaves.</a:t>
             </a:r>
             <a:endParaRPr lang="en-US" sz="1200" dirty="0"/>
           </a:p>
@@ -2536,7 +2536,7 @@
                 <a:ea typeface="Work Sans" pitchFamily="34" charset="-122"/>
                 <a:cs typeface="Work Sans" pitchFamily="34" charset="-120"/>
               </a:rPr>
-              <a:t>SATIS GROUP — THE SYSTEMS BEHIND THE WEBSITE</a:t>
+              <a:t>SATIS GROUP · THE SYSTEMS BEHIND THE WEBSITE</a:t>
             </a:r>
             <a:endParaRPr lang="en-US" sz="700" dirty="0"/>
           </a:p>
@@ -2838,7 +2838,7 @@
                 <a:ea typeface="Work Sans" pitchFamily="34" charset="-122"/>
                 <a:cs typeface="Work Sans" pitchFamily="34" charset="-120"/>
               </a:rPr>
-              <a:t>/admin and the portal are hidden from search engines and linked from nowhere public. Investor data is assembled per account — one investor's browser never receives another's figures.</a:t>
+              <a:t>/admin and the portal are hidden from search engines and linked from nowhere public. Investor data is assembled per account: one investor's browser never receives another's figures.</a:t>
             </a:r>
             <a:endParaRPr lang="en-US" sz="1100" dirty="0"/>
           </a:p>
@@ -3133,7 +3133,7 @@
                 <a:ea typeface="Work Sans" pitchFamily="34" charset="-122"/>
                 <a:cs typeface="Work Sans" pitchFamily="34" charset="-120"/>
               </a:rPr>
-              <a:t>SATIS GROUP — THE SYSTEMS BEHIND THE WEBSITE</a:t>
+              <a:t>SATIS GROUP · THE SYSTEMS BEHIND THE WEBSITE</a:t>
             </a:r>
             <a:endParaRPr lang="en-US" sz="700" dirty="0"/>
           </a:p>
@@ -3281,7 +3281,7 @@
                 <a:ea typeface="Work Sans" pitchFamily="34" charset="-122"/>
                 <a:cs typeface="Work Sans" pitchFamily="34" charset="-120"/>
               </a:rPr>
-              <a:t>HM Land Registry — market data in
+              <a:t>HM Land Registry: market data in
 </a:t>
             </a:r>
             <a:pPr indent="0" marL="0">
@@ -3323,7 +3323,7 @@
                 <a:ea typeface="Work Sans" pitchFamily="34" charset="-122"/>
                 <a:cs typeface="Work Sans" pitchFamily="34" charset="-120"/>
               </a:rPr>
-              <a:t>If the feed is slow or down, the site quietly falls back to a stored snapshot — data either way, never an error.</a:t>
+              <a:t>If the feed is slow or down, the site quietly falls back to a stored snapshot. Data either way, never an error.</a:t>
             </a:r>
             <a:endParaRPr lang="en-US" sz="1100" dirty="0"/>
           </a:p>
@@ -3393,7 +3393,7 @@
                 <a:ea typeface="Work Sans" pitchFamily="34" charset="-122"/>
                 <a:cs typeface="Work Sans" pitchFamily="34" charset="-120"/>
               </a:rPr>
-              <a:t>GitHub releases — version lookup
+              <a:t>GitHub releases: version lookup
 </a:t>
             </a:r>
             <a:pPr indent="0" marL="0">
@@ -3435,7 +3435,7 @@
                 <a:ea typeface="Work Sans" pitchFamily="34" charset="-122"/>
                 <a:cs typeface="Work Sans" pitchFamily="34" charset="-120"/>
               </a:rPr>
-              <a:t>If the lookup fails, the download buttons still work — only the version line hides.</a:t>
+              <a:t>If the lookup fails, the download buttons still work; only the version line hides.</a:t>
             </a:r>
             <a:endParaRPr lang="en-US" sz="1100" dirty="0"/>
           </a:p>
@@ -3505,7 +3505,7 @@
                 <a:ea typeface="Work Sans" pitchFamily="34" charset="-122"/>
                 <a:cs typeface="Work Sans" pitchFamily="34" charset="-120"/>
               </a:rPr>
-              <a:t>Resend — enquiry email out
+              <a:t>Resend: enquiry email out
 </a:t>
             </a:r>
             <a:pPr indent="0" marL="0">
@@ -3547,7 +3547,7 @@
                 <a:ea typeface="Work Sans" pitchFamily="34" charset="-122"/>
                 <a:cs typeface="Work Sans" pitchFamily="34" charset="-120"/>
               </a:rPr>
-              <a:t>If sending fails, the visitor is shown the team's address to write directly — an enquiry is never dropped silently.</a:t>
+              <a:t>If sending fails, the visitor is shown the team's address to write directly. An enquiry is never dropped silently.</a:t>
             </a:r>
             <a:endParaRPr lang="en-US" sz="1100" dirty="0"/>
           </a:p>
@@ -3751,7 +3751,7 @@
                 <a:ea typeface="Work Sans" pitchFamily="34" charset="-122"/>
                 <a:cs typeface="Work Sans" pitchFamily="34" charset="-120"/>
               </a:rPr>
-              <a:t>SATIS GROUP — THE SYSTEMS BEHIND THE WEBSITE</a:t>
+              <a:t>SATIS GROUP · THE SYSTEMS BEHIND THE WEBSITE</a:t>
             </a:r>
             <a:endParaRPr lang="en-US" sz="700" dirty="0"/>
           </a:p>
@@ -4079,7 +4079,7 @@
                           <a:ea typeface="Work Sans" pitchFamily="34" charset="-122"/>
                           <a:cs typeface="Work Sans" pitchFamily="34" charset="-120"/>
                         </a:rPr>
-                        <a:t>The rebuild hasn't finished — or the commit never pushed</a:t>
+                        <a:t>The rebuild hasn't finished, or the commit never pushed</a:t>
                       </a:r>
                       <a:endParaRPr lang="en-US" sz="1000" dirty="0">
                         <a:latin typeface="Work Sans" charset="0"/>
@@ -4365,7 +4365,7 @@
                           <a:ea typeface="Work Sans" pitchFamily="34" charset="-122"/>
                           <a:cs typeface="Work Sans" pitchFamily="34" charset="-120"/>
                         </a:rPr>
-                        <a:t>Normal on live hosting — stories go through the repository</a:t>
+                        <a:t>Normal on live hosting: stories go through the repository</a:t>
                       </a:r>
                       <a:endParaRPr lang="en-US" sz="1000" dirty="0">
                         <a:latin typeface="Work Sans" charset="0"/>
@@ -4555,7 +4555,7 @@
                           <a:ea typeface="Work Sans" pitchFamily="34" charset="-122"/>
                           <a:cs typeface="Work Sans" pitchFamily="34" charset="-120"/>
                         </a:rPr>
-                        <a:t>Webinars 03 / 04 playbooks — which door first</a:t>
+                        <a:t>Webinars 03 / 04 playbooks; which door first</a:t>
                       </a:r>
                       <a:endParaRPr lang="en-US" sz="1000" dirty="0">
                         <a:latin typeface="Work Sans" charset="0"/>
@@ -4698,7 +4698,7 @@
                           <a:ea typeface="Work Sans" pitchFamily="34" charset="-122"/>
                           <a:cs typeface="Work Sans" pitchFamily="34" charset="-120"/>
                         </a:rPr>
-                        <a:t>Check the key in Vercel, redeploy — the visitor was shown the direct address meanwhile</a:t>
+                        <a:t>Check the key in Vercel, redeploy; the visitor was shown the direct address meanwhile</a:t>
                       </a:r>
                       <a:endParaRPr lang="en-US" sz="1000" dirty="0">
                         <a:latin typeface="Work Sans" charset="0"/>
@@ -4794,7 +4794,7 @@
                           <a:ea typeface="Work Sans" pitchFamily="34" charset="-122"/>
                           <a:cs typeface="Work Sans" pitchFamily="34" charset="-120"/>
                         </a:rPr>
-                        <a:t>Hosting or DNS — not content</a:t>
+                        <a:t>Hosting or DNS, not content</a:t>
                       </a:r>
                       <a:endParaRPr lang="en-US" sz="1000" dirty="0">
                         <a:latin typeface="Work Sans" charset="0"/>
@@ -5074,7 +5074,7 @@
                 <a:ea typeface="Work Sans" pitchFamily="34" charset="-122"/>
                 <a:cs typeface="Work Sans" pitchFamily="34" charset="-120"/>
               </a:rPr>
-              <a:t>SATIS GROUP — THE SYSTEMS BEHIND THE WEBSITE</a:t>
+              <a:t>SATIS GROUP · THE SYSTEMS BEHIND THE WEBSITE</a:t>
             </a:r>
             <a:endParaRPr lang="en-US" sz="700" dirty="0"/>
           </a:p>
@@ -5285,7 +5285,7 @@
                 <a:ea typeface="Work Sans" pitchFamily="34" charset="-122"/>
                 <a:cs typeface="Work Sans" pitchFamily="34" charset="-120"/>
               </a:rPr>
-              <a:t>By design — the repository is the system of record. Everything in webinars 02 and 04 relies on exactly this.</a:t>
+              <a:t>By design: the repository is the system of record. Everything in webinars 02 and 04 relies on exactly this.</a:t>
             </a:r>
             <a:endParaRPr lang="en-US" sz="1100" dirty="0"/>
           </a:p>
@@ -5376,7 +5376,7 @@
                 <a:ea typeface="Work Sans" pitchFamily="34" charset="-122"/>
                 <a:cs typeface="Work Sans" pitchFamily="34" charset="-120"/>
               </a:rPr>
-              <a:t>Publishing a story emails nobody automatically, and the subscriber list is mid-rollout. The sending rail (Resend) is in place — connecting the two is a small job once the list lands.</a:t>
+              <a:t>Publishing a story emails nobody automatically, and the subscriber list is mid-rollout. The sending rail (Resend) is in place; connecting the two is a small job once the list lands.</a:t>
             </a:r>
             <a:endParaRPr lang="en-US" sz="1100" dirty="0"/>
           </a:p>
@@ -5678,7 +5678,7 @@
                 <a:ea typeface="Work Sans" pitchFamily="34" charset="-122"/>
                 <a:cs typeface="Work Sans" pitchFamily="34" charset="-120"/>
               </a:rPr>
-              <a:t>SATIS GROUP — THE SYSTEMS BEHIND THE WEBSITE</a:t>
+              <a:t>SATIS GROUP · THE SYSTEMS BEHIND THE WEBSITE</a:t>
             </a:r>
             <a:endParaRPr lang="en-US" sz="700" dirty="0"/>
           </a:p>
@@ -5826,7 +5826,7 @@
                 <a:ea typeface="Work Sans" pitchFamily="34" charset="-122"/>
                 <a:cs typeface="Work Sans" pitchFamily="34" charset="-120"/>
               </a:rPr>
-              <a:t>GitHub is also the database and the audit trail — there is no separate database.</a:t>
+              <a:t>GitHub is also the database and the audit trail. There is no separate database.</a:t>
             </a:r>
             <a:endParaRPr lang="en-US" sz="1250" dirty="0"/>
           </a:p>
@@ -6028,7 +6028,7 @@
                 <a:ea typeface="Work Sans" pitchFamily="34" charset="-122"/>
                 <a:cs typeface="Work Sans" pitchFamily="34" charset="-120"/>
               </a:rPr>
-              <a:t>Deployment questions: ask Claude — it can check commits and deploys.</a:t>
+              <a:t>Deployment questions: ask Claude. It can check commits and deploys.</a:t>
             </a:r>
             <a:endParaRPr lang="en-US" sz="1050" dirty="0"/>
           </a:p>
@@ -6333,7 +6333,7 @@
                 <a:ea typeface="Work Sans" pitchFamily="34" charset="-122"/>
                 <a:cs typeface="Work Sans" pitchFamily="34" charset="-120"/>
               </a:rPr>
-              <a:t>SATIS GROUP — THE SYSTEMS BEHIND THE WEBSITE</a:t>
+              <a:t>SATIS GROUP · THE SYSTEMS BEHIND THE WEBSITE</a:t>
             </a:r>
             <a:endParaRPr lang="en-US" sz="700" dirty="0"/>
           </a:p>
@@ -6453,7 +6453,7 @@
                 <a:ea typeface="Work Sans" pitchFamily="34" charset="-122"/>
                 <a:cs typeface="Work Sans" pitchFamily="34" charset="-120"/>
               </a:rPr>
-              <a:t>Nothing here needs doing day to day — this is the map that makes every other webinar make sense.</a:t>
+              <a:t>Nothing here needs doing day to day. This is the map that makes every other webinar make sense.</a:t>
             </a:r>
             <a:endParaRPr lang="en-US" sz="1150" dirty="0"/>
           </a:p>
@@ -6651,7 +6651,7 @@
                 <a:ea typeface="Work Sans" pitchFamily="34" charset="-122"/>
                 <a:cs typeface="Work Sans" pitchFamily="34" charset="-120"/>
               </a:rPr>
-              <a:t>GitHub — the master copy</a:t>
+              <a:t>GitHub: the master copy</a:t>
             </a:r>
             <a:endParaRPr lang="en-US" sz="1250" dirty="0"/>
           </a:p>
@@ -6771,7 +6771,7 @@
                 <a:ea typeface="Work Sans" pitchFamily="34" charset="-122"/>
                 <a:cs typeface="Work Sans" pitchFamily="34" charset="-120"/>
               </a:rPr>
-              <a:t>Vercel — the printing press</a:t>
+              <a:t>Vercel: the printing press</a:t>
             </a:r>
             <a:endParaRPr lang="en-US" sz="1250" dirty="0"/>
           </a:p>
@@ -6891,7 +6891,7 @@
                 <a:ea typeface="Work Sans" pitchFamily="34" charset="-122"/>
                 <a:cs typeface="Work Sans" pitchFamily="34" charset="-120"/>
               </a:rPr>
-              <a:t>123 Reg — the address book</a:t>
+              <a:t>123 Reg: the address book</a:t>
             </a:r>
             <a:endParaRPr lang="en-US" sz="1250" dirty="0"/>
           </a:p>
@@ -7053,7 +7053,7 @@
                 <a:ea typeface="Work Sans" pitchFamily="34" charset="-122"/>
                 <a:cs typeface="Work Sans" pitchFamily="34" charset="-120"/>
               </a:rPr>
-              <a:t>Five values in Vercel and what each does.</a:t>
+              <a:t>The values in Vercel and what each does.</a:t>
             </a:r>
             <a:endParaRPr lang="en-US" sz="950" dirty="0"/>
           </a:p>
@@ -7377,7 +7377,7 @@
                 <a:ea typeface="Work Sans" pitchFamily="34" charset="-122"/>
                 <a:cs typeface="Work Sans" pitchFamily="34" charset="-120"/>
               </a:rPr>
-              <a:t>SATIS GROUP — THE SYSTEMS BEHIND THE WEBSITE</a:t>
+              <a:t>SATIS GROUP · THE SYSTEMS BEHIND THE WEBSITE</a:t>
             </a:r>
             <a:endParaRPr lang="en-US" sz="700" dirty="0"/>
           </a:p>
@@ -7641,7 +7641,7 @@
                 <a:ea typeface="Work Sans" pitchFamily="34" charset="-122"/>
                 <a:cs typeface="Work Sans" pitchFamily="34" charset="-120"/>
               </a:rPr>
-              <a:t>master copy — repository</a:t>
+              <a:t>master copy · repository</a:t>
             </a:r>
             <a:endParaRPr lang="en-US" sz="1100" dirty="0"/>
           </a:p>
@@ -8610,7 +8610,7 @@
                 <a:ea typeface="Work Sans" pitchFamily="34" charset="-122"/>
                 <a:cs typeface="Work Sans" pitchFamily="34" charset="-120"/>
               </a:rPr>
-              <a:t>SATIS GROUP — THE SYSTEMS BEHIND THE WEBSITE</a:t>
+              <a:t>SATIS GROUP · THE SYSTEMS BEHIND THE WEBSITE</a:t>
             </a:r>
             <a:endParaRPr lang="en-US" sz="700" dirty="0"/>
           </a:p>
@@ -8688,7 +8688,7 @@
                 <a:ea typeface="Work Sans" pitchFamily="34" charset="-122"/>
                 <a:cs typeface="Work Sans" pitchFamily="34" charset="-120"/>
               </a:rPr>
-              <a:t>GitHub: the master copy — and the database.</a:t>
+              <a:t>GitHub: the master copy, and the database.</a:t>
             </a:r>
             <a:endParaRPr lang="en-US" sz="2500" dirty="0"/>
           </a:p>
@@ -8821,7 +8821,7 @@
                 <a:ea typeface="Work Sans" pitchFamily="34" charset="-122"/>
                 <a:cs typeface="Work Sans" pitchFamily="34" charset="-120"/>
               </a:rPr>
-              <a:t>Pages, design, photography, code — the brochure master. Claude sessions edit here; the live site reprints from here.</a:t>
+              <a:t>Pages, design, photography, code. The brochure master. Claude sessions edit here; the live site reprints from here.</a:t>
             </a:r>
             <a:endParaRPr lang="en-US" sz="1100" dirty="0"/>
           </a:p>
@@ -8912,7 +8912,7 @@
                 <a:ea typeface="Work Sans" pitchFamily="34" charset="-122"/>
                 <a:cs typeface="Work Sans" pitchFamily="34" charset="-120"/>
               </a:rPr>
-              <a:t>There is no separate database. News stories and every investor-platform dataset are files in the repository — which is why exports, backups and Claude edits all work the same way.</a:t>
+              <a:t>There is no separate database. News stories and every investor-platform dataset are files in the repository, which is why exports, backups and Claude edits all work the same way.</a:t>
             </a:r>
             <a:endParaRPr lang="en-US" sz="1100" dirty="0"/>
           </a:p>
@@ -9207,7 +9207,7 @@
                 <a:ea typeface="Work Sans" pitchFamily="34" charset="-122"/>
                 <a:cs typeface="Work Sans" pitchFamily="34" charset="-120"/>
               </a:rPr>
-              <a:t>SATIS GROUP — THE SYSTEMS BEHIND THE WEBSITE</a:t>
+              <a:t>SATIS GROUP · THE SYSTEMS BEHIND THE WEBSITE</a:t>
             </a:r>
             <a:endParaRPr lang="en-US" sz="700" dirty="0"/>
           </a:p>
@@ -9327,7 +9327,7 @@
                 <a:ea typeface="Work Sans" pitchFamily="34" charset="-122"/>
                 <a:cs typeface="Work Sans" pitchFamily="34" charset="-120"/>
               </a:rPr>
-              <a:t>Vercel watches the repository and turns the master copy into the fast, public website — automatically.</a:t>
+              <a:t>Vercel watches the repository and turns the master copy into the fast, public website, automatically.</a:t>
             </a:r>
             <a:endParaRPr lang="en-US" sz="1150" dirty="0"/>
           </a:p>
@@ -9418,7 +9418,7 @@
                 <a:ea typeface="Work Sans" pitchFamily="34" charset="-122"/>
                 <a:cs typeface="Work Sans" pitchFamily="34" charset="-120"/>
               </a:rPr>
-              <a:t>Each merged commit triggers a rebuild — the “reprint”. A few minutes later the new version is what visitors get, worldwide.</a:t>
+              <a:t>Each merged commit triggers a rebuild: the “reprint”. A few minutes later the new version is what visitors get, worldwide.</a:t>
             </a:r>
             <a:endParaRPr lang="en-US" sz="1100" dirty="0"/>
           </a:p>
@@ -9509,7 +9509,7 @@
                 <a:ea typeface="Work Sans" pitchFamily="34" charset="-122"/>
                 <a:cs typeface="Work Sans" pitchFamily="34" charset="-120"/>
               </a:rPr>
-              <a:t>Vercel also holds the site's private settings — admin accounts, signing secrets, the repository token. Changing one requires a redeploy to take effect.</a:t>
+              <a:t>Vercel also holds the site's private settings: admin accounts, signing secrets, the repository token, the email key. Changing one requires a redeploy to take effect.</a:t>
             </a:r>
             <a:endParaRPr lang="en-US" sz="1100" dirty="0"/>
           </a:p>
@@ -9804,7 +9804,7 @@
                 <a:ea typeface="Work Sans" pitchFamily="34" charset="-122"/>
                 <a:cs typeface="Work Sans" pitchFamily="34" charset="-120"/>
               </a:rPr>
-              <a:t>SATIS GROUP — THE SYSTEMS BEHIND THE WEBSITE</a:t>
+              <a:t>SATIS GROUP · THE SYSTEMS BEHIND THE WEBSITE</a:t>
             </a:r>
             <a:endParaRPr lang="en-US" sz="700" dirty="0"/>
           </a:p>
@@ -9882,7 +9882,7 @@
                 <a:ea typeface="Work Sans" pitchFamily="34" charset="-122"/>
                 <a:cs typeface="Work Sans" pitchFamily="34" charset="-120"/>
               </a:rPr>
-              <a:t>How a change travels — and how long it takes.</a:t>
+              <a:t>How a change travels, and how long it takes.</a:t>
             </a:r>
             <a:endParaRPr lang="en-US" sz="2500" dirty="0"/>
           </a:p>
@@ -10161,7 +10161,7 @@
                 <a:ea typeface="Work Sans" pitchFamily="34" charset="-122"/>
                 <a:cs typeface="Work Sans" pitchFamily="34" charset="-120"/>
               </a:rPr>
-              <a:t>automatic — nothing to press</a:t>
+              <a:t>automatic; nothing to press</a:t>
             </a:r>
             <a:endParaRPr lang="en-US" sz="1100" dirty="0"/>
           </a:p>
@@ -10502,7 +10502,7 @@
                 <a:ea typeface="Work Sans" pitchFamily="34" charset="-122"/>
                 <a:cs typeface="Work Sans" pitchFamily="34" charset="-120"/>
               </a:rPr>
-              <a:t>give any change a minute or two, then refresh the page. Not there after ten minutes? Ask Claude whether the commit pushed and the deployment succeeded — it can check both.</a:t>
+              <a:t>give any change a minute or two, then refresh the page. Not there after ten minutes? Ask Claude whether the commit pushed and the deployment succeeded; it can check both.</a:t>
             </a:r>
             <a:endParaRPr lang="en-US" sz="1150" dirty="0"/>
           </a:p>
@@ -10706,7 +10706,7 @@
                 <a:ea typeface="Work Sans" pitchFamily="34" charset="-122"/>
                 <a:cs typeface="Work Sans" pitchFamily="34" charset="-120"/>
               </a:rPr>
-              <a:t>SATIS GROUP — THE SYSTEMS BEHIND THE WEBSITE</a:t>
+              <a:t>SATIS GROUP · THE SYSTEMS BEHIND THE WEBSITE</a:t>
             </a:r>
             <a:endParaRPr lang="en-US" sz="700" dirty="0"/>
           </a:p>
@@ -10826,7 +10826,7 @@
                 <a:ea typeface="Work Sans" pitchFamily="34" charset="-122"/>
                 <a:cs typeface="Work Sans" pitchFamily="34" charset="-120"/>
               </a:rPr>
-              <a:t>123 Reg is the domain registrar — the company the satisgroup.co.uk name is registered with. It plays two roles:</a:t>
+              <a:t>123 Reg is the domain registrar: the company the satisgroup.co.uk name is registered with. It plays two roles:</a:t>
             </a:r>
             <a:endParaRPr lang="en-US" sz="1150" dirty="0"/>
           </a:p>
@@ -10938,7 +10938,7 @@
                 <a:ea typeface="Work Sans" pitchFamily="34" charset="-122"/>
                 <a:cs typeface="Work Sans" pitchFamily="34" charset="-120"/>
               </a:rPr>
-              <a:t>Touched rarely — at go-live, or if hosting ever moves. Vercel's domain settings state exactly what the records must say.</a:t>
+              <a:t>Touched rarely: at go-live, or if hosting ever moves. Vercel's domain settings state exactly what the records must say.</a:t>
             </a:r>
             <a:endParaRPr lang="en-US" sz="1100" dirty="0"/>
           </a:p>
@@ -11029,7 +11029,7 @@
                 <a:ea typeface="Work Sans" pitchFamily="34" charset="-122"/>
                 <a:cs typeface="Work Sans" pitchFamily="34" charset="-120"/>
               </a:rPr>
-              <a:t>The @satisgroup.co.uk email addresses are mailboxes managed alongside the domain — including the enquiries inbox the website's email links feed (webinar 07).
+              <a:t>The @satisgroup.co.uk email addresses are mailboxes managed alongside the domain, including the enquiries inbox (noreply.ai@satisgroup.co.uk) that the website's forms and email links feed. Webinar 07 covers it.
 </a:t>
             </a:r>
             <a:pPr indent="0" marL="0">
@@ -11254,7 +11254,7 @@
                 <a:ea typeface="Work Sans" pitchFamily="34" charset="-122"/>
                 <a:cs typeface="Work Sans" pitchFamily="34" charset="-120"/>
               </a:rPr>
-              <a:t>SATIS GROUP — THE SYSTEMS BEHIND THE WEBSITE</a:t>
+              <a:t>SATIS GROUP · THE SYSTEMS BEHIND THE WEBSITE</a:t>
             </a:r>
             <a:endParaRPr lang="en-US" sz="700" dirty="0"/>
           </a:p>
@@ -11624,7 +11624,7 @@
                           <a:ea typeface="Work Sans" pitchFamily="34" charset="-122"/>
                           <a:cs typeface="Work Sans" pitchFamily="34" charset="-120"/>
                         </a:rPr>
-                        <a:t>The list of admin accounts — who can sign in at /admin.</a:t>
+                        <a:t>The list of admin accounts: who can sign in at /admin.</a:t>
                       </a:r>
                       <a:endParaRPr lang="en-US" sz="1000" dirty="0">
                         <a:latin typeface="Work Sans" charset="0"/>
@@ -11957,7 +11957,7 @@
                           <a:ea typeface="Work Sans" pitchFamily="34" charset="-122"/>
                           <a:cs typeface="Work Sans" pitchFamily="34" charset="-120"/>
                         </a:rPr>
-                        <a:t>Optional — falls back to the admin secret.</a:t>
+                        <a:t>Optional; falls back to the admin secret.</a:t>
                       </a:r>
                       <a:endParaRPr lang="en-US" sz="1000" dirty="0">
                         <a:latin typeface="Work Sans" charset="0"/>
@@ -12100,7 +12100,7 @@
                           <a:ea typeface="Work Sans" pitchFamily="34" charset="-122"/>
                           <a:cs typeface="Work Sans" pitchFamily="34" charset="-120"/>
                         </a:rPr>
-                        <a:t>Set once; renew when it expires — next slide.</a:t>
+                        <a:t>Set once; renew when it expires (next slide).</a:t>
                       </a:r>
                       <a:endParaRPr lang="en-US" sz="1000" dirty="0">
                         <a:latin typeface="Work Sans" charset="0"/>
@@ -12529,7 +12529,7 @@
                           <a:ea typeface="Work Sans" pitchFamily="34" charset="-122"/>
                           <a:cs typeface="Work Sans" pitchFamily="34" charset="-120"/>
                         </a:rPr>
-                        <a:t>Already https://www.satisgroup.co.uk — leave it.</a:t>
+                        <a:t>Already https://www.satisgroup.co.uk; leave it.</a:t>
                       </a:r>
                       <a:endParaRPr lang="en-US" sz="1000" dirty="0">
                         <a:latin typeface="Work Sans" charset="0"/>
@@ -12762,7 +12762,7 @@
                 <a:ea typeface="Work Sans" pitchFamily="34" charset="-122"/>
                 <a:cs typeface="Work Sans" pitchFamily="34" charset="-120"/>
               </a:rPr>
-              <a:t>SATIS GROUP — THE SYSTEMS BEHIND THE WEBSITE</a:t>
+              <a:t>SATIS GROUP · THE SYSTEMS BEHIND THE WEBSITE</a:t>
             </a:r>
             <a:endParaRPr lang="en-US" sz="700" dirty="0"/>
           </a:p>
@@ -12882,7 +12882,7 @@
                 <a:ea typeface="Work Sans" pitchFamily="34" charset="-122"/>
                 <a:cs typeface="Work Sans" pitchFamily="34" charset="-120"/>
               </a:rPr>
-              <a:t>On the live site, every platform-studio Save quietly becomes a commit to the repository — powered by one credential: SATIS_GITHUB_TOKEN. When it is missing or expired, the studio warns that changes will not save. Renewal:</a:t>
+              <a:t>On the live site, every platform-studio Save quietly becomes a commit to the repository, powered by one credential: SATIS_GITHUB_TOKEN. When it is missing or expired, the studio warns that changes will not save. Renewal:</a:t>
             </a:r>
             <a:endParaRPr lang="en-US" sz="1150" dirty="0"/>
           </a:p>
@@ -13162,7 +13162,7 @@
                 <a:ea typeface="Work Sans" pitchFamily="34" charset="-122"/>
                 <a:cs typeface="Work Sans" pitchFamily="34" charset="-120"/>
               </a:rPr>
-              <a:t>Access to only the satis-group-website repository, with “Contents: Read and write” permission — nothing more.</a:t>
+              <a:t>Access to only the satis-group-website repository, with “Contents: Read and write” permission. Nothing more.</a:t>
             </a:r>
             <a:endParaRPr lang="en-US" sz="1050" dirty="0"/>
           </a:p>
@@ -13427,7 +13427,7 @@
                 <a:ea typeface="Work Sans" pitchFamily="34" charset="-122"/>
                 <a:cs typeface="Work Sans" pitchFamily="34" charset="-120"/>
               </a:rPr>
-              <a:t>GitHub gives every token an expiry date. When the studio starts warning again, that is all it is — generate a new token and update the variable. Ask Claude to walk through it the first time.</a:t>
+              <a:t>GitHub gives every token an expiry date. When the studio starts warning again, that is all it is: generate a new token and update the variable. Ask Claude to walk through it the first time.</a:t>
             </a:r>
             <a:endParaRPr lang="en-US" sz="1100" dirty="0"/>
           </a:p>
